--- a/ris-presentation.pptx
+++ b/ris-presentation.pptx
@@ -7,7 +7,6 @@
   <p:sldIdLst>
     <p:sldId id="257" r:id="rId2"/>
     <p:sldId id="258" r:id="rId3"/>
-    <p:sldId id="259" r:id="rId4"/>
   </p:sldIdLst>
   <p:sldSz cx="15119350" cy="10691813"/>
   <p:notesSz cx="10234613" cy="14663738"/>
@@ -7979,98 +7978,6 @@
 </p:sld>
 </file>
 
-<file path=ppt/slides/slide3.xml><?xml version="1.0" encoding="utf-8"?>
-<p:sld xmlns:a="http://schemas.openxmlformats.org/drawingml/2006/main" xmlns:r="http://schemas.openxmlformats.org/officeDocument/2006/relationships" xmlns:p="http://schemas.openxmlformats.org/presentationml/2006/main">
-  <p:cSld>
-    <p:spTree>
-      <p:nvGrpSpPr>
-        <p:cNvPr id="1" name=""/>
-        <p:cNvGrpSpPr/>
-        <p:nvPr/>
-      </p:nvGrpSpPr>
-      <p:grpSpPr>
-        <a:xfrm>
-          <a:off x="0" y="0"/>
-          <a:ext cx="0" cy="0"/>
-          <a:chOff x="0" y="0"/>
-          <a:chExt cx="0" cy="0"/>
-        </a:xfrm>
-      </p:grpSpPr>
-      <p:pic>
-        <p:nvPicPr>
-          <p:cNvPr id="7" name="Picture 6">
-            <a:extLst>
-              <a:ext uri="{FF2B5EF4-FFF2-40B4-BE49-F238E27FC236}">
-                <a16:creationId xmlns:a16="http://schemas.microsoft.com/office/drawing/2014/main" id="{D1ACF4C8-43A2-993F-E03B-69358A290FCD}"/>
-              </a:ext>
-            </a:extLst>
-          </p:cNvPr>
-          <p:cNvPicPr>
-            <a:picLocks noChangeAspect="1"/>
-          </p:cNvPicPr>
-          <p:nvPr/>
-        </p:nvPicPr>
-        <p:blipFill>
-          <a:blip r:embed="rId2"/>
-          <a:srcRect l="7402" t="64464" r="62088" b="6173"/>
-          <a:stretch>
-            <a:fillRect/>
-          </a:stretch>
-        </p:blipFill>
-        <p:spPr>
-          <a:xfrm>
-            <a:off x="1119116" y="6892119"/>
-            <a:ext cx="4612944" cy="3138985"/>
-          </a:xfrm>
-          <a:prstGeom prst="rect">
-            <a:avLst/>
-          </a:prstGeom>
-        </p:spPr>
-      </p:pic>
-      <p:pic>
-        <p:nvPicPr>
-          <p:cNvPr id="9" name="Picture 8">
-            <a:extLst>
-              <a:ext uri="{FF2B5EF4-FFF2-40B4-BE49-F238E27FC236}">
-                <a16:creationId xmlns:a16="http://schemas.microsoft.com/office/drawing/2014/main" id="{ACC74883-F3F7-58D2-F9D4-0419CBE025A9}"/>
-              </a:ext>
-            </a:extLst>
-          </p:cNvPr>
-          <p:cNvPicPr>
-            <a:picLocks noChangeAspect="1"/>
-          </p:cNvPicPr>
-          <p:nvPr/>
-        </p:nvPicPr>
-        <p:blipFill>
-          <a:blip r:embed="rId2"/>
-          <a:srcRect l="10020" t="42250" r="61456" b="45494"/>
-          <a:stretch>
-            <a:fillRect/>
-          </a:stretch>
-        </p:blipFill>
-        <p:spPr>
-          <a:xfrm>
-            <a:off x="1514900" y="4517409"/>
-            <a:ext cx="4312693" cy="1310185"/>
-          </a:xfrm>
-          <a:prstGeom prst="rect">
-            <a:avLst/>
-          </a:prstGeom>
-        </p:spPr>
-      </p:pic>
-    </p:spTree>
-    <p:extLst>
-      <p:ext uri="{BB962C8B-B14F-4D97-AF65-F5344CB8AC3E}">
-        <p14:creationId xmlns:p14="http://schemas.microsoft.com/office/powerpoint/2010/main" val="2814101218"/>
-      </p:ext>
-    </p:extLst>
-  </p:cSld>
-  <p:clrMapOvr>
-    <a:masterClrMapping/>
-  </p:clrMapOvr>
-</p:sld>
-</file>
-
 <file path=ppt/theme/theme1.xml><?xml version="1.0" encoding="utf-8"?>
 <a:theme xmlns:a="http://schemas.openxmlformats.org/drawingml/2006/main" name="Office Theme">
   <a:themeElements>
